--- a/public/decks/2026-09-mae-masked-autoencoders.pptx
+++ b/public/decks/2026-09-mae-masked-autoencoders.pptx
@@ -19992,7 +19992,7 @@
                 <a:ea typeface="Arial" pitchFamily="34" charset="-122"/>
                 <a:cs typeface="Arial" pitchFamily="34" charset="-120"/>
               </a:rPr>
-              <a:t>58</a:t>
+              <a:t>47</a:t>
             </a:r>
             <a:pPr algn="l" indent="0" marL="0">
               <a:lnSpc>
